--- a/10 - NSparkAvancé - Spark ML PCA.pptx
+++ b/10 - NSparkAvancé - Spark ML PCA.pptx
@@ -226,7 +226,7 @@
           <a:p>
             <a:fld id="{6DEFCF4C-C656-4173-9B19-E1AF5C686E36}" type="datetimeFigureOut">
               <a:rPr lang="fr-FR" smtClean="0"/>
-              <a:t>13/12/2025</a:t>
+              <a:t>30/09/2026</a:t>
             </a:fld>
             <a:endParaRPr lang="fr-FR"/>
           </a:p>
@@ -800,7 +800,7 @@
           <a:p>
             <a:fld id="{1D8BD707-D9CF-40AE-B4C6-C98DA3205C09}" type="datetimeFigureOut">
               <a:rPr lang="en-US"/>
-              <a:t>12/13/2025</a:t>
+              <a:t>9/30/2026</a:t>
             </a:fld>
             <a:endParaRPr lang="en-US"/>
           </a:p>
@@ -992,7 +992,7 @@
           <a:p>
             <a:fld id="{1D8BD707-D9CF-40AE-B4C6-C98DA3205C09}" type="datetimeFigureOut">
               <a:rPr lang="en-US"/>
-              <a:t>12/13/2025</a:t>
+              <a:t>9/30/2026</a:t>
             </a:fld>
             <a:endParaRPr lang="en-US"/>
           </a:p>
@@ -1223,7 +1223,7 @@
           <a:p>
             <a:fld id="{1D8BD707-D9CF-40AE-B4C6-C98DA3205C09}" type="datetimeFigureOut">
               <a:rPr lang="en-US"/>
-              <a:t>12/13/2025</a:t>
+              <a:t>9/30/2026</a:t>
             </a:fld>
             <a:endParaRPr lang="en-US"/>
           </a:p>
@@ -1425,7 +1425,7 @@
           <a:p>
             <a:fld id="{1D8BD707-D9CF-40AE-B4C6-C98DA3205C09}" type="datetimeFigureOut">
               <a:rPr lang="en-US"/>
-              <a:t>12/13/2025</a:t>
+              <a:t>9/30/2026</a:t>
             </a:fld>
             <a:endParaRPr lang="en-US"/>
           </a:p>
@@ -1561,7 +1561,7 @@
           <a:p>
             <a:fld id="{1D8BD707-D9CF-40AE-B4C6-C98DA3205C09}" type="datetimeFigureOut">
               <a:rPr lang="en-US"/>
-              <a:t>12/13/2025</a:t>
+              <a:t>9/30/2026</a:t>
             </a:fld>
             <a:endParaRPr lang="en-US"/>
           </a:p>
@@ -1663,7 +1663,7 @@
           <a:p>
             <a:fld id="{FE69C2FC-FDFD-4827-B361-612217FFD460}" type="datetimeFigureOut">
               <a:rPr lang="fr-FR" smtClean="0"/>
-              <a:t>13/12/2025</a:t>
+              <a:t>30/09/2026</a:t>
             </a:fld>
             <a:endParaRPr lang="fr-FR"/>
           </a:p>
@@ -2175,7 +2175,7 @@
           <a:p>
             <a:fld id="{1D8BD707-D9CF-40AE-B4C6-C98DA3205C09}" type="datetimeFigureOut">
               <a:rPr lang="en-US"/>
-              <a:t>12/13/2025</a:t>
+              <a:t>9/30/2026</a:t>
             </a:fld>
             <a:endParaRPr lang="en-US"/>
           </a:p>
@@ -20429,21 +20429,6 @@
 </file>
 
 <file path=customXml/item1.xml><?xml version="1.0" encoding="utf-8"?>
-<p:properties xmlns:p="http://schemas.microsoft.com/office/2006/metadata/properties" xmlns:xsi="http://www.w3.org/2001/XMLSchema-instance" xmlns:pc="http://schemas.microsoft.com/office/infopath/2007/PartnerControls">
-  <documentManagement>
-    <SharedWithUsers xmlns="73eca01c-4ea5-40c8-83fd-b296bd340025">
-      <UserInfo>
-        <DisplayName>Abir GUENICH - Ingénieure d’affaire</DisplayName>
-        <AccountId>246</AccountId>
-        <AccountType/>
-      </UserInfo>
-    </SharedWithUsers>
-    <_activity xmlns="6f1b3788-58c0-46a5-9604-64d97c7fc47c" xsi:nil="true"/>
-  </documentManagement>
-</p:properties>
-</file>
-
-<file path=customXml/item2.xml><?xml version="1.0" encoding="utf-8"?>
 <ct:contentTypeSchema xmlns:ct="http://schemas.microsoft.com/office/2006/metadata/contentType" xmlns:ma="http://schemas.microsoft.com/office/2006/metadata/properties/metaAttributes" ct:_="" ma:_="" ma:contentTypeName="Document" ma:contentTypeID="0x01010058419B1710D3DF4A9DAA9ADF73C802B5" ma:contentTypeVersion="14" ma:contentTypeDescription="Crée un document." ma:contentTypeScope="" ma:versionID="d45f398bd182fafaec1e6b20d8a38b6f">
   <xsd:schema xmlns:xsd="http://www.w3.org/2001/XMLSchema" xmlns:xs="http://www.w3.org/2001/XMLSchema" xmlns:p="http://schemas.microsoft.com/office/2006/metadata/properties" xmlns:ns3="6f1b3788-58c0-46a5-9604-64d97c7fc47c" xmlns:ns4="73eca01c-4ea5-40c8-83fd-b296bd340025" targetNamespace="http://schemas.microsoft.com/office/2006/metadata/properties" ma:root="true" ma:fieldsID="de746a5257d740f042749d495693305b" ns3:_="" ns4:_="">
     <xsd:import namespace="6f1b3788-58c0-46a5-9604-64d97c7fc47c"/>
@@ -20668,6 +20653,21 @@
 </ct:contentTypeSchema>
 </file>
 
+<file path=customXml/item2.xml><?xml version="1.0" encoding="utf-8"?>
+<p:properties xmlns:p="http://schemas.microsoft.com/office/2006/metadata/properties" xmlns:xsi="http://www.w3.org/2001/XMLSchema-instance" xmlns:pc="http://schemas.microsoft.com/office/infopath/2007/PartnerControls">
+  <documentManagement>
+    <SharedWithUsers xmlns="73eca01c-4ea5-40c8-83fd-b296bd340025">
+      <UserInfo>
+        <DisplayName>Abir GUENICH - Ingénieure d’affaire</DisplayName>
+        <AccountId>246</AccountId>
+        <AccountType/>
+      </UserInfo>
+    </SharedWithUsers>
+    <_activity xmlns="6f1b3788-58c0-46a5-9604-64d97c7fc47c" xsi:nil="true"/>
+  </documentManagement>
+</p:properties>
+</file>
+
 <file path=customXml/item3.xml><?xml version="1.0" encoding="utf-8"?>
 <?mso-contentType ?>
 <FormTemplates xmlns="http://schemas.microsoft.com/sharepoint/v3/contenttype/forms">
@@ -20678,23 +20678,6 @@
 </file>
 
 <file path=customXml/itemProps1.xml><?xml version="1.0" encoding="utf-8"?>
-<ds:datastoreItem xmlns:ds="http://schemas.openxmlformats.org/officeDocument/2006/customXml" ds:itemID="{40C00205-F11F-4D61-9572-D162BE7CE022}">
-  <ds:schemaRefs>
-    <ds:schemaRef ds:uri="http://schemas.microsoft.com/office/infopath/2007/PartnerControls"/>
-    <ds:schemaRef ds:uri="http://purl.org/dc/terms/"/>
-    <ds:schemaRef ds:uri="http://purl.org/dc/elements/1.1/"/>
-    <ds:schemaRef ds:uri="6f1b3788-58c0-46a5-9604-64d97c7fc47c"/>
-    <ds:schemaRef ds:uri="73eca01c-4ea5-40c8-83fd-b296bd340025"/>
-    <ds:schemaRef ds:uri="http://purl.org/dc/dcmitype/"/>
-    <ds:schemaRef ds:uri="http://schemas.openxmlformats.org/package/2006/metadata/core-properties"/>
-    <ds:schemaRef ds:uri="http://schemas.microsoft.com/office/2006/documentManagement/types"/>
-    <ds:schemaRef ds:uri="http://www.w3.org/XML/1998/namespace"/>
-    <ds:schemaRef ds:uri="http://schemas.microsoft.com/office/2006/metadata/properties"/>
-  </ds:schemaRefs>
-</ds:datastoreItem>
-</file>
-
-<file path=customXml/itemProps2.xml><?xml version="1.0" encoding="utf-8"?>
 <ds:datastoreItem xmlns:ds="http://schemas.openxmlformats.org/officeDocument/2006/customXml" ds:itemID="{13D40C7A-64C6-4B3B-A1B6-9CB64BC75662}">
   <ds:schemaRefs>
     <ds:schemaRef ds:uri="http://schemas.microsoft.com/office/2006/metadata/contentType"/>
@@ -20713,6 +20696,23 @@
 </ds:datastoreItem>
 </file>
 
+<file path=customXml/itemProps2.xml><?xml version="1.0" encoding="utf-8"?>
+<ds:datastoreItem xmlns:ds="http://schemas.openxmlformats.org/officeDocument/2006/customXml" ds:itemID="{40C00205-F11F-4D61-9572-D162BE7CE022}">
+  <ds:schemaRefs>
+    <ds:schemaRef ds:uri="http://schemas.microsoft.com/office/infopath/2007/PartnerControls"/>
+    <ds:schemaRef ds:uri="http://purl.org/dc/terms/"/>
+    <ds:schemaRef ds:uri="http://purl.org/dc/elements/1.1/"/>
+    <ds:schemaRef ds:uri="6f1b3788-58c0-46a5-9604-64d97c7fc47c"/>
+    <ds:schemaRef ds:uri="73eca01c-4ea5-40c8-83fd-b296bd340025"/>
+    <ds:schemaRef ds:uri="http://purl.org/dc/dcmitype/"/>
+    <ds:schemaRef ds:uri="http://schemas.openxmlformats.org/package/2006/metadata/core-properties"/>
+    <ds:schemaRef ds:uri="http://schemas.microsoft.com/office/2006/documentManagement/types"/>
+    <ds:schemaRef ds:uri="http://www.w3.org/XML/1998/namespace"/>
+    <ds:schemaRef ds:uri="http://schemas.microsoft.com/office/2006/metadata/properties"/>
+  </ds:schemaRefs>
+</ds:datastoreItem>
+</file>
+
 <file path=customXml/itemProps3.xml><?xml version="1.0" encoding="utf-8"?>
 <ds:datastoreItem xmlns:ds="http://schemas.openxmlformats.org/officeDocument/2006/customXml" ds:itemID="{EBAA46D8-DF31-4768-AD82-8F485C82E644}">
   <ds:schemaRefs>
